--- a/presentations/agentic-wallet-guardian-chainhack.pptx
+++ b/presentations/agentic-wallet-guardian-chainhack.pptx
@@ -10,6 +10,8 @@
     <p:sldId id="258" r:id="rId4"/>
     <p:sldId id="259" r:id="rId5"/>
     <p:sldId id="260" r:id="rId6"/>
+    <p:sldId id="265" r:id="rId16"/>
+    <p:sldId id="266" r:id="rId17"/>
     <p:sldId id="261" r:id="rId7"/>
     <p:sldId id="262" r:id="rId8"/>
     <p:sldId id="263" r:id="rId9"/>
@@ -1736,6 +1738,752 @@
 </p:sld>
 </file>
 
+<file path=ppt/slides/slide10.xml><?xml version="1.0" encoding="utf-8"?>
+<p:sld xmlns:a="http://schemas.openxmlformats.org/drawingml/2006/main" xmlns:r="http://schemas.openxmlformats.org/officeDocument/2006/relationships" xmlns:p="http://schemas.openxmlformats.org/presentationml/2006/main">
+  <p:cSld name="Slide 2">
+    <p:bg>
+      <p:bgPr>
+        <a:solidFill>
+          <a:srgbClr val="15161E"/>
+        </a:solidFill>
+      </p:bgPr>
+    </p:bg>
+    <p:spTree>
+      <p:nvGrpSpPr>
+        <p:cNvPr id="1" name=""/>
+        <p:cNvGrpSpPr/>
+        <p:nvPr/>
+      </p:nvGrpSpPr>
+      <p:grpSpPr>
+        <a:xfrm>
+          <a:off x="0" y="0"/>
+          <a:ext cx="0" cy="0"/>
+          <a:chOff x="0" y="0"/>
+          <a:chExt cx="0" cy="0"/>
+        </a:xfrm>
+      </p:grpSpPr>
+      <p:sp>
+        <p:nvSpPr>
+          <p:cNvPr id="2" name="Text 0"/>
+          <p:cNvSpPr/>
+          <p:nvPr/>
+        </p:nvSpPr>
+        <p:spPr>
+          <a:xfrm>
+            <a:off x="548640" y="457200"/>
+            <a:ext cx="7315200" cy="365760"/>
+          </a:xfrm>
+          <a:prstGeom prst="rect">
+            <a:avLst/>
+          </a:prstGeom>
+          <a:noFill/>
+          <a:ln/>
+        </p:spPr>
+        <p:txBody>
+          <a:bodyPr wrap="square" rtlCol="0" anchor="ctr"/>
+          <a:lstStyle/>
+          <a:p>
+            <a:pPr indent="0" marL="0">
+              <a:buNone/>
+            </a:pPr>
+            <a:r>
+              <a:rPr lang="en-US" sz="1400" b="1" spc="200" kern="0" dirty="0">
+                <a:solidFill>
+                  <a:srgbClr val="8BE9FD"/>
+                </a:solidFill>
+                <a:latin typeface="Consolas" pitchFamily="34" charset="0"/>
+                <a:ea typeface="Consolas" pitchFamily="34" charset="-122"/>
+                <a:cs typeface="Consolas" pitchFamily="34" charset="-120"/>
+              </a:rPr>
+              <a:t>PROOF OF RIGOR</a:t>
+            </a:r>
+            <a:endParaRPr lang="en-US" sz="1400" dirty="0"/>
+          </a:p>
+        </p:txBody>
+      </p:sp>
+      <p:sp>
+        <p:nvSpPr>
+          <p:cNvPr id="3" name="Text 1"/>
+          <p:cNvSpPr/>
+          <p:nvPr/>
+        </p:nvSpPr>
+        <p:spPr>
+          <a:xfrm>
+            <a:off x="548640" y="914400"/>
+            <a:ext cx="9601200" cy="1463040"/>
+          </a:xfrm>
+          <a:prstGeom prst="rect">
+            <a:avLst/>
+          </a:prstGeom>
+          <a:noFill/>
+          <a:ln/>
+        </p:spPr>
+        <p:txBody>
+          <a:bodyPr wrap="square" rtlCol="0" anchor="ctr"/>
+          <a:lstStyle/>
+          <a:p>
+            <a:pPr indent="0" marL="0">
+              <a:lnSpc>
+                <a:spcPts val="4200"/>
+              </a:lnSpc>
+              <a:buNone/>
+            </a:pPr>
+            <a:r>
+              <a:rPr lang="en-US" sz="3600" b="1" dirty="0">
+                <a:solidFill>
+                  <a:srgbClr val="F8F8F2"/>
+                </a:solidFill>
+                <a:latin typeface="Georgia" pitchFamily="34" charset="0"/>
+                <a:ea typeface="Georgia" pitchFamily="34" charset="-122"/>
+                <a:cs typeface="Georgia" pitchFamily="34" charset="-120"/>
+              </a:rPr>
+              <a:t>We attack our own code</a:t>
+            </a:r>
+            <a:endParaRPr lang="en-US" sz="3600" dirty="0"/>
+          </a:p>
+          <a:p>
+            <a:pPr indent="0" marL="0">
+              <a:lnSpc>
+                <a:spcPts val="4200"/>
+              </a:lnSpc>
+              <a:buNone/>
+            </a:pPr>
+            <a:r>
+              <a:rPr lang="en-US" sz="3600" b="1" dirty="0">
+                <a:solidFill>
+                  <a:srgbClr val="F8F8F2"/>
+                </a:solidFill>
+                <a:latin typeface="Georgia" pitchFamily="34" charset="0"/>
+                <a:ea typeface="Georgia" pitchFamily="34" charset="-122"/>
+                <a:cs typeface="Georgia" pitchFamily="34" charset="-120"/>
+              </a:rPr>
+              <a:t>before anyone else can.</a:t>
+            </a:r>
+            <a:endParaRPr lang="en-US" sz="3600" dirty="0"/>
+          </a:p>
+        </p:txBody>
+      </p:sp>
+      <p:sp>
+        <p:nvSpPr>
+          <p:cNvPr id="4" name="Shape 2"/>
+          <p:cNvSpPr/>
+          <p:nvPr/>
+        </p:nvSpPr>
+        <p:spPr>
+          <a:xfrm>
+            <a:off x="548640" y="2743200"/>
+            <a:ext cx="11064240" cy="3108960"/>
+          </a:xfrm>
+          <a:prstGeom prst="roundRect">
+            <a:avLst>
+              <a:gd name="adj" fmla="val 3529"/>
+            </a:avLst>
+          </a:prstGeom>
+          <a:solidFill>
+            <a:srgbClr val="1E1F2A"/>
+          </a:solidFill>
+          <a:ln/>
+        </p:spPr>
+      </p:sp>
+      <p:pic>
+        <p:nvPicPr>
+          <p:cNvPr id="5" name="Image 0" descr="/home/claude/chainhack-deck/icons/code.png">    </p:cNvPr>
+          <p:cNvPicPr>
+            <a:picLocks noChangeAspect="1"/>
+          </p:cNvPicPr>
+          <p:nvPr/>
+        </p:nvPicPr>
+        <p:blipFill>
+          <a:blip r:embed="rId1"/>
+          <a:stretch>
+            <a:fillRect/>
+          </a:stretch>
+        </p:blipFill>
+        <p:spPr>
+          <a:xfrm>
+            <a:off x="868680" y="3017520"/>
+            <a:ext cx="365760" cy="365760"/>
+          </a:xfrm>
+          <a:prstGeom prst="rect">
+            <a:avLst/>
+          </a:prstGeom>
+        </p:spPr>
+      </p:pic>
+      <p:sp>
+        <p:nvSpPr>
+          <p:cNvPr id="6" name="Text 3"/>
+          <p:cNvSpPr/>
+          <p:nvPr/>
+        </p:nvSpPr>
+        <p:spPr>
+          <a:xfrm>
+            <a:off x="1371600" y="2999232"/>
+            <a:ext cx="9144000" cy="365760"/>
+          </a:xfrm>
+          <a:prstGeom prst="rect">
+            <a:avLst/>
+          </a:prstGeom>
+          <a:noFill/>
+          <a:ln/>
+        </p:spPr>
+        <p:txBody>
+          <a:bodyPr wrap="square" rtlCol="0" anchor="ctr"/>
+          <a:lstStyle/>
+          <a:p>
+            <a:pPr indent="0" marL="0">
+              <a:buNone/>
+            </a:pPr>
+            <a:r>
+              <a:rPr lang="en-US" sz="1600" dirty="0">
+                <a:solidFill>
+                  <a:srgbClr val="F8F8F2"/>
+                </a:solidFill>
+                <a:latin typeface="Consolas" pitchFamily="34" charset="0"/>
+                <a:ea typeface="Consolas" pitchFamily="34" charset="-122"/>
+                <a:cs typeface="Consolas" pitchFamily="34" charset="-120"/>
+              </a:rPr>
+              <a:t>$ independent adversarial security pass — 2026-08-23</a:t>
+            </a:r>
+            <a:endParaRPr lang="en-US" sz="1600" dirty="0"/>
+          </a:p>
+        </p:txBody>
+      </p:sp>
+      <p:sp>
+        <p:nvSpPr>
+          <p:cNvPr id="7" name="Text 4"/>
+          <p:cNvSpPr/>
+          <p:nvPr/>
+        </p:nvSpPr>
+        <p:spPr>
+          <a:xfrm>
+            <a:off x="1371600" y="3611880"/>
+            <a:ext cx="9875520" cy="320040"/>
+          </a:xfrm>
+          <a:prstGeom prst="rect">
+            <a:avLst/>
+          </a:prstGeom>
+          <a:noFill/>
+          <a:ln/>
+        </p:spPr>
+        <p:txBody>
+          <a:bodyPr wrap="square" rtlCol="0" anchor="ctr"/>
+          <a:lstStyle/>
+          <a:p>
+            <a:pPr indent="0" marL="0">
+              <a:buNone/>
+            </a:pPr>
+            <a:r>
+              <a:rPr lang="en-US" sz="1500" dirty="0">
+                <a:solidFill>
+                  <a:srgbClr val="8B92B0"/>
+                </a:solidFill>
+                <a:latin typeface="Consolas" pitchFamily="34" charset="0"/>
+                <a:ea typeface="Consolas" pitchFamily="34" charset="-122"/>
+                <a:cs typeface="Consolas" pitchFamily="34" charset="-120"/>
+              </a:rPr>
+              <a:t>Case: the exact scenario this project exists to catch</a:t>
+            </a:r>
+            <a:endParaRPr lang="en-US" sz="1500" dirty="0"/>
+          </a:p>
+        </p:txBody>
+      </p:sp>
+      <p:sp>
+        <p:nvSpPr>
+          <p:cNvPr id="8" name="Text 5"/>
+          <p:cNvSpPr/>
+          <p:nvPr/>
+        </p:nvSpPr>
+        <p:spPr>
+          <a:xfrm>
+            <a:off x="1371600" y="3995928"/>
+            <a:ext cx="9875520" cy="320040"/>
+          </a:xfrm>
+          <a:prstGeom prst="rect">
+            <a:avLst/>
+          </a:prstGeom>
+          <a:noFill/>
+          <a:ln/>
+        </p:spPr>
+        <p:txBody>
+          <a:bodyPr wrap="square" rtlCol="0" anchor="ctr"/>
+          <a:lstStyle/>
+          <a:p>
+            <a:pPr indent="0" marL="0">
+              <a:buNone/>
+            </a:pPr>
+            <a:r>
+              <a:rPr lang="en-US" sz="1500" dirty="0">
+                <a:solidFill>
+                  <a:srgbClr val="FF5555"/>
+                </a:solidFill>
+                <a:latin typeface="Consolas" pitchFamily="34" charset="0"/>
+                <a:ea typeface="Consolas" pitchFamily="34" charset="-122"/>
+                <a:cs typeface="Consolas" pitchFamily="34" charset="-120"/>
+              </a:rPr>
+              <a:t>[FOUND] unlimited-approval signal scored 75 — below the 90 needed to force BLOCK</a:t>
+            </a:r>
+            <a:endParaRPr lang="en-US" sz="1500" dirty="0"/>
+          </a:p>
+        </p:txBody>
+      </p:sp>
+      <p:sp>
+        <p:nvSpPr>
+          <p:cNvPr id="9" name="Text 6"/>
+          <p:cNvSpPr/>
+          <p:nvPr/>
+        </p:nvSpPr>
+        <p:spPr>
+          <a:xfrm>
+            <a:off x="1371600" y="4379976"/>
+            <a:ext cx="9875520" cy="320040"/>
+          </a:xfrm>
+          <a:prstGeom prst="rect">
+            <a:avLst/>
+          </a:prstGeom>
+          <a:noFill/>
+          <a:ln/>
+        </p:spPr>
+        <p:txBody>
+          <a:bodyPr wrap="square" rtlCol="0" anchor="ctr"/>
+          <a:lstStyle/>
+          <a:p>
+            <a:pPr indent="0" marL="0">
+              <a:buNone/>
+            </a:pPr>
+            <a:r>
+              <a:rPr lang="en-US" sz="1500" dirty="0">
+                <a:solidFill>
+                  <a:srgbClr val="50FA7B"/>
+                </a:solidFill>
+                <a:latin typeface="Consolas" pitchFamily="34" charset="0"/>
+                <a:ea typeface="Consolas" pitchFamily="34" charset="-122"/>
+                <a:cs typeface="Consolas" pitchFamily="34" charset="-120"/>
+              </a:rPr>
+              <a:t>[FIXED] raised to 92 + an independent hard BLOCK rule, with tests</a:t>
+            </a:r>
+            <a:endParaRPr lang="en-US" sz="1500" dirty="0"/>
+          </a:p>
+        </p:txBody>
+      </p:sp>
+      <p:sp>
+        <p:nvSpPr>
+          <p:cNvPr id="10" name="Text 7"/>
+          <p:cNvSpPr/>
+          <p:nvPr/>
+        </p:nvSpPr>
+        <p:spPr>
+          <a:xfrm>
+            <a:off x="1371600" y="4764024"/>
+            <a:ext cx="9875520" cy="320040"/>
+          </a:xfrm>
+          <a:prstGeom prst="rect">
+            <a:avLst/>
+          </a:prstGeom>
+          <a:noFill/>
+          <a:ln/>
+        </p:spPr>
+        <p:txBody>
+          <a:bodyPr wrap="square" rtlCol="0" anchor="ctr"/>
+          <a:lstStyle/>
+          <a:p>
+            <a:pPr indent="0" marL="0">
+              <a:buNone/>
+            </a:pPr>
+            <a:r>
+              <a:rPr lang="en-US" sz="1500" dirty="0">
+                <a:solidFill>
+                  <a:srgbClr val="FF5555"/>
+                </a:solidFill>
+                <a:latin typeface="Consolas" pitchFamily="34" charset="0"/>
+                <a:ea typeface="Consolas" pitchFamily="34" charset="-122"/>
+                <a:cs typeface="Consolas" pitchFamily="34" charset="-120"/>
+              </a:rPr>
+              <a:t>[FOUND] one shared API key let any caller inherit any agent's reputation</a:t>
+            </a:r>
+            <a:endParaRPr lang="en-US" sz="1500" dirty="0"/>
+          </a:p>
+        </p:txBody>
+      </p:sp>
+      <p:sp>
+        <p:nvSpPr>
+          <p:cNvPr id="11" name="Text 8"/>
+          <p:cNvSpPr/>
+          <p:nvPr/>
+        </p:nvSpPr>
+        <p:spPr>
+          <a:xfrm>
+            <a:off x="1371600" y="5148072"/>
+            <a:ext cx="9875520" cy="320040"/>
+          </a:xfrm>
+          <a:prstGeom prst="rect">
+            <a:avLst/>
+          </a:prstGeom>
+          <a:noFill/>
+          <a:ln/>
+        </p:spPr>
+        <p:txBody>
+          <a:bodyPr wrap="square" rtlCol="0" anchor="ctr"/>
+          <a:lstStyle/>
+          <a:p>
+            <a:pPr indent="0" marL="0">
+              <a:buNone/>
+            </a:pPr>
+            <a:r>
+              <a:rPr lang="en-US" sz="1500" dirty="0">
+                <a:solidFill>
+                  <a:srgbClr val="50FA7B"/>
+                </a:solidFill>
+                <a:latin typeface="Consolas" pitchFamily="34" charset="0"/>
+                <a:ea typeface="Consolas" pitchFamily="34" charset="-122"/>
+                <a:cs typeface="Consolas" pitchFamily="34" charset="-120"/>
+              </a:rPr>
+              <a:t>[FIXED] per-agent keys — a caller only acts as the agent it holds the key for</a:t>
+            </a:r>
+            <a:endParaRPr lang="en-US" sz="1500" dirty="0"/>
+          </a:p>
+        </p:txBody>
+      </p:sp>
+      <p:sp>
+        <p:nvSpPr>
+          <p:cNvPr id="12" name="Text 9"/>
+          <p:cNvSpPr/>
+          <p:nvPr/>
+        </p:nvSpPr>
+        <p:spPr>
+          <a:xfrm>
+            <a:off x="1371600" y="5532120"/>
+            <a:ext cx="9875520" cy="320040"/>
+          </a:xfrm>
+          <a:prstGeom prst="rect">
+            <a:avLst/>
+          </a:prstGeom>
+          <a:noFill/>
+          <a:ln/>
+        </p:spPr>
+        <p:txBody>
+          <a:bodyPr wrap="square" rtlCol="0" anchor="ctr"/>
+          <a:lstStyle/>
+          <a:p>
+            <a:pPr indent="0" marL="0">
+              <a:buNone/>
+            </a:pPr>
+            <a:r>
+              <a:rPr lang="en-US" sz="1500" dirty="0">
+                <a:solidFill>
+                  <a:srgbClr val="F8F8F2"/>
+                </a:solidFill>
+                <a:latin typeface="Consolas" pitchFamily="34" charset="0"/>
+                <a:ea typeface="Consolas" pitchFamily="34" charset="-122"/>
+                <a:cs typeface="Consolas" pitchFamily="34" charset="-120"/>
+              </a:rPr>
+              <a:t>6 findings, 6 real fixes, 29 new tests — all before anyone else looked.</a:t>
+            </a:r>
+            <a:endParaRPr lang="en-US" sz="1500" dirty="0"/>
+          </a:p>
+        </p:txBody>
+      </p:sp>
+      <p:sp>
+        <p:nvSpPr>
+          <p:cNvPr id="13" name="Text 10"/>
+          <p:cNvSpPr/>
+          <p:nvPr/>
+        </p:nvSpPr>
+        <p:spPr>
+          <a:xfrm>
+            <a:off x="11091672" y="6400800"/>
+            <a:ext cx="731520" cy="320040"/>
+          </a:xfrm>
+          <a:prstGeom prst="rect">
+            <a:avLst/>
+          </a:prstGeom>
+          <a:noFill/>
+          <a:ln/>
+        </p:spPr>
+        <p:txBody>
+          <a:bodyPr wrap="square" rtlCol="0" anchor="ctr"/>
+          <a:lstStyle/>
+          <a:p>
+            <a:pPr algn="r" indent="0" marL="0">
+              <a:buNone/>
+            </a:pPr>
+            <a:r>
+              <a:rPr lang="en-US" sz="1100" dirty="0">
+                <a:solidFill>
+                  <a:srgbClr val="8B92B0"/>
+                </a:solidFill>
+                <a:latin typeface="Consolas" pitchFamily="34" charset="0"/>
+                <a:ea typeface="Consolas" pitchFamily="34" charset="-122"/>
+                <a:cs typeface="Consolas" pitchFamily="34" charset="-120"/>
+              </a:rPr>
+              <a:t>6 / 11</a:t>
+            </a:r>
+            <a:endParaRPr lang="en-US" sz="1100" dirty="0"/>
+          </a:p>
+        </p:txBody>
+      </p:sp>
+    </p:spTree>
+  </p:cSld>
+  <p:clrMapOvr>
+    <a:masterClrMapping/>
+  </p:clrMapOvr>
+</p:sld>
+</file>
+
+<file path=ppt/slides/slide11.xml><?xml version="1.0" encoding="utf-8"?>
+<p:sld xmlns:a="http://schemas.openxmlformats.org/drawingml/2006/main" xmlns:r="http://schemas.openxmlformats.org/officeDocument/2006/relationships" xmlns:p="http://schemas.openxmlformats.org/presentationml/2006/main">
+  <p:cSld name="Slide 2">
+    <p:bg>
+      <p:bgPr>
+        <a:solidFill>
+          <a:srgbClr val="15161E"/>
+        </a:solidFill>
+      </p:bgPr>
+    </p:bg>
+    <p:spTree>
+      <p:nvGrpSpPr>
+        <p:cNvPr id="1" name=""/>
+        <p:cNvGrpSpPr/>
+        <p:nvPr/>
+      </p:nvGrpSpPr>
+      <p:grpSpPr>
+        <a:xfrm>
+          <a:off x="0" y="0"/>
+          <a:ext cx="0" cy="0"/>
+          <a:chOff x="0" y="0"/>
+          <a:chExt cx="0" cy="0"/>
+        </a:xfrm>
+      </p:grpSpPr>
+      <p:sp>
+        <p:nvSpPr>
+          <p:cNvPr id="2" name="Text 0"/>
+          <p:cNvSpPr/>
+          <p:nvPr/>
+        </p:nvSpPr>
+        <p:spPr>
+          <a:xfrm>
+            <a:off x="548640" y="457200"/>
+            <a:ext cx="7315200" cy="365760"/>
+          </a:xfrm>
+          <a:prstGeom prst="rect">
+            <a:avLst/>
+          </a:prstGeom>
+          <a:noFill/>
+          <a:ln/>
+        </p:spPr>
+        <p:txBody>
+          <a:bodyPr wrap="square" rtlCol="0" anchor="ctr"/>
+          <a:lstStyle/>
+          <a:p>
+            <a:pPr indent="0" marL="0">
+              <a:buNone/>
+            </a:pPr>
+            <a:r>
+              <a:rPr lang="en-US" sz="1400" b="1" spc="200" kern="0" dirty="0">
+                <a:solidFill>
+                  <a:srgbClr val="8BE9FD"/>
+                </a:solidFill>
+                <a:latin typeface="Consolas" pitchFamily="34" charset="0"/>
+                <a:ea typeface="Consolas" pitchFamily="34" charset="-122"/>
+                <a:cs typeface="Consolas" pitchFamily="34" charset="-120"/>
+              </a:rPr>
+              <a:t>LIVE DEMO</a:t>
+            </a:r>
+            <a:endParaRPr lang="en-US" sz="1400" dirty="0"/>
+          </a:p>
+        </p:txBody>
+      </p:sp>
+      <p:sp>
+        <p:nvSpPr>
+          <p:cNvPr id="3" name="Text 1"/>
+          <p:cNvSpPr/>
+          <p:nvPr/>
+        </p:nvSpPr>
+        <p:spPr>
+          <a:xfrm>
+            <a:off x="548640" y="914400"/>
+            <a:ext cx="9601200" cy="1463040"/>
+          </a:xfrm>
+          <a:prstGeom prst="rect">
+            <a:avLst/>
+          </a:prstGeom>
+          <a:noFill/>
+          <a:ln/>
+        </p:spPr>
+        <p:txBody>
+          <a:bodyPr wrap="square" rtlCol="0" anchor="ctr"/>
+          <a:lstStyle/>
+          <a:p>
+            <a:pPr indent="0" marL="0">
+              <a:lnSpc>
+                <a:spcPts val="4200"/>
+              </a:lnSpc>
+              <a:buNone/>
+            </a:pPr>
+            <a:r>
+              <a:rPr lang="en-US" sz="3600" b="1" dirty="0">
+                <a:solidFill>
+                  <a:srgbClr val="F8F8F2"/>
+                </a:solidFill>
+                <a:latin typeface="Georgia" pitchFamily="34" charset="0"/>
+                <a:ea typeface="Georgia" pitchFamily="34" charset="-122"/>
+                <a:cs typeface="Georgia" pitchFamily="34" charset="-120"/>
+              </a:rPr>
+              <a:t>Open a browser.</a:t>
+            </a:r>
+            <a:endParaRPr lang="en-US" sz="3600" dirty="0"/>
+          </a:p>
+          <a:p>
+            <a:pPr indent="0" marL="0">
+              <a:lnSpc>
+                <a:spcPts val="4200"/>
+              </a:lnSpc>
+              <a:buNone/>
+            </a:pPr>
+            <a:r>
+              <a:rPr lang="en-US" sz="3600" b="1" dirty="0">
+                <a:solidFill>
+                  <a:srgbClr val="F8F8F2"/>
+                </a:solidFill>
+                <a:latin typeface="Georgia" pitchFamily="34" charset="0"/>
+                <a:ea typeface="Georgia" pitchFamily="34" charset="-122"/>
+                <a:cs typeface="Georgia" pitchFamily="34" charset="-120"/>
+              </a:rPr>
+              <a:t>Watch it decide, live.</a:t>
+            </a:r>
+            <a:endParaRPr lang="en-US" sz="3600" dirty="0"/>
+          </a:p>
+        </p:txBody>
+      </p:sp>
+      <p:sp>
+        <p:nvSpPr>
+          <p:cNvPr id="4" name="Shape 2"/>
+          <p:cNvSpPr/>
+          <p:nvPr/>
+        </p:nvSpPr>
+        <p:spPr>
+          <a:xfrm>
+            <a:off x="3402600" y="2440000"/>
+            <a:ext cx="5386800" cy="3920000"/>
+          </a:xfrm>
+          <a:prstGeom prst="roundRect">
+            <a:avLst>
+              <a:gd name="adj" fmla="val 3529"/>
+            </a:avLst>
+          </a:prstGeom>
+          <a:solidFill>
+            <a:srgbClr val="1E1F2A"/>
+          </a:solidFill>
+          <a:ln/>
+        </p:spPr>
+      </p:sp>
+      <p:pic>
+        <p:nvPicPr>
+          <p:cNvPr id="5" name="Guardian live demo screenshot" descr="Guardian live decision console showing a real BLOCK decision with risk score 100.0"/>
+          <p:cNvPicPr>
+            <a:picLocks noChangeAspect="1"/>
+          </p:cNvPicPr>
+          <p:nvPr/>
+        </p:nvPicPr>
+        <p:blipFill>
+          <a:blip r:embed="rId3"/>
+          <a:stretch>
+            <a:fillRect/>
+          </a:stretch>
+        </p:blipFill>
+        <p:spPr>
+          <a:xfrm>
+            <a:off x="3462600" y="2500000"/>
+            <a:ext cx="5266800" cy="3800000"/>
+          </a:xfrm>
+          <a:prstGeom prst="rect">
+            <a:avLst/>
+          </a:prstGeom>
+        </p:spPr>
+      </p:pic>
+      <p:sp>
+        <p:nvSpPr>
+          <p:cNvPr id="6" name="Caption"/>
+          <p:cNvSpPr/>
+          <p:nvPr/>
+        </p:nvSpPr>
+        <p:spPr>
+          <a:xfrm>
+            <a:off x="548640" y="6400800"/>
+            <a:ext cx="9144000" cy="320040"/>
+          </a:xfrm>
+          <a:prstGeom prst="rect">
+            <a:avLst/>
+          </a:prstGeom>
+          <a:noFill/>
+          <a:ln/>
+        </p:spPr>
+        <p:txBody>
+          <a:bodyPr wrap="square" rtlCol="0" anchor="ctr"/>
+          <a:lstStyle/>
+          <a:p>
+            <a:pPr indent="0" marL="0">
+              <a:buNone/>
+            </a:pPr>
+            <a:r>
+              <a:rPr lang="en-US" sz="1200" dirty="0">
+                <a:solidFill>
+                  <a:srgbClr val="8B92B0"/>
+                </a:solidFill>
+                <a:latin typeface="Consolas" pitchFamily="34" charset="0"/>
+              </a:rPr>
+              <a:t>examples/browser-demo.html — a real POST /decision call to a locally running Guardian instance</a:t>
+            </a:r>
+            <a:endParaRPr lang="en-US" sz="1200" dirty="0"/>
+          </a:p>
+        </p:txBody>
+      </p:sp>
+      <p:sp>
+        <p:nvSpPr>
+          <p:cNvPr id="13" name="Text 10"/>
+          <p:cNvSpPr/>
+          <p:nvPr/>
+        </p:nvSpPr>
+        <p:spPr>
+          <a:xfrm>
+            <a:off x="11091672" y="6400800"/>
+            <a:ext cx="731520" cy="320040"/>
+          </a:xfrm>
+          <a:prstGeom prst="rect">
+            <a:avLst/>
+          </a:prstGeom>
+          <a:noFill/>
+          <a:ln/>
+        </p:spPr>
+        <p:txBody>
+          <a:bodyPr wrap="square" rtlCol="0" anchor="ctr"/>
+          <a:lstStyle/>
+          <a:p>
+            <a:pPr algn="r" indent="0" marL="0">
+              <a:buNone/>
+            </a:pPr>
+            <a:r>
+              <a:rPr lang="en-US" sz="1100" dirty="0">
+                <a:solidFill>
+                  <a:srgbClr val="8B92B0"/>
+                </a:solidFill>
+                <a:latin typeface="Consolas" pitchFamily="34" charset="0"/>
+                <a:ea typeface="Consolas" pitchFamily="34" charset="-122"/>
+                <a:cs typeface="Consolas" pitchFamily="34" charset="-120"/>
+              </a:rPr>
+              <a:t>7 / 11</a:t>
+            </a:r>
+            <a:endParaRPr lang="en-US" sz="1100" dirty="0"/>
+          </a:p>
+        </p:txBody>
+      </p:sp>
+    </p:spTree>
+  </p:cSld>
+  <p:clrMapOvr>
+    <a:masterClrMapping/>
+  </p:clrMapOvr>
+</p:sld>
+</file>
+
 <file path=ppt/slides/slide2.xml><?xml version="1.0" encoding="utf-8"?>
 <p:sld xmlns:a="http://schemas.openxmlformats.org/drawingml/2006/main" xmlns:r="http://schemas.openxmlformats.org/officeDocument/2006/relationships" xmlns:p="http://schemas.openxmlformats.org/presentationml/2006/main">
   <p:cSld name="Slide 2">
@@ -2202,7 +2950,7 @@
                 <a:ea typeface="Consolas" pitchFamily="34" charset="-122"/>
                 <a:cs typeface="Consolas" pitchFamily="34" charset="-120"/>
               </a:rPr>
-              <a:t>2 / 9</a:t>
+              <a:t>2 / 11</a:t>
             </a:r>
             <a:endParaRPr lang="en-US" sz="1100" dirty="0"/>
           </a:p>
@@ -2732,7 +3480,7 @@
                 <a:ea typeface="Consolas" pitchFamily="34" charset="-122"/>
                 <a:cs typeface="Consolas" pitchFamily="34" charset="-120"/>
               </a:rPr>
-              <a:t>3 / 9</a:t>
+              <a:t>3 / 11</a:t>
             </a:r>
             <a:endParaRPr lang="en-US" sz="1100" dirty="0"/>
           </a:p>
@@ -3635,7 +4383,7 @@
                 <a:ea typeface="Consolas" pitchFamily="34" charset="-122"/>
                 <a:cs typeface="Consolas" pitchFamily="34" charset="-120"/>
               </a:rPr>
-              <a:t>4 / 9</a:t>
+              <a:t>4 / 11</a:t>
             </a:r>
             <a:endParaRPr lang="en-US" sz="1100" dirty="0"/>
           </a:p>
@@ -3806,7 +4554,7 @@
                 <a:ea typeface="Georgia" pitchFamily="34" charset="-122"/>
                 <a:cs typeface="Georgia" pitchFamily="34" charset="-120"/>
               </a:rPr>
-              <a:t>101 / 101</a:t>
+              <a:t>247 / 255</a:t>
             </a:r>
             <a:endParaRPr lang="en-US" sz="3000" dirty="0"/>
           </a:p>
@@ -4169,7 +4917,7 @@
                 <a:ea typeface="Consolas" pitchFamily="34" charset="-122"/>
                 <a:cs typeface="Consolas" pitchFamily="34" charset="-120"/>
               </a:rPr>
-              <a:t>101 passed, 5 warnings in 1.00s</a:t>
+              <a:t>247 passed, 8 skipped, 6 warnings in 4.09s</a:t>
             </a:r>
             <a:endParaRPr lang="en-US" sz="1600" dirty="0"/>
           </a:p>
@@ -4247,7 +4995,7 @@
                 <a:ea typeface="Consolas" pitchFamily="34" charset="-122"/>
                 <a:cs typeface="Consolas" pitchFamily="34" charset="-120"/>
               </a:rPr>
-              <a:t>5 / 9</a:t>
+              <a:t>5 / 11</a:t>
             </a:r>
             <a:endParaRPr lang="en-US" sz="1100" dirty="0"/>
           </a:p>
@@ -4769,7 +5517,7 @@
                 <a:ea typeface="Consolas" pitchFamily="34" charset="-122"/>
                 <a:cs typeface="Consolas" pitchFamily="34" charset="-120"/>
               </a:rPr>
-              <a:t>6 / 9</a:t>
+              <a:t>8 / 11</a:t>
             </a:r>
             <a:endParaRPr lang="en-US" sz="1100" dirty="0"/>
           </a:p>
@@ -5341,7 +6089,7 @@
                 <a:ea typeface="Consolas" pitchFamily="34" charset="-122"/>
                 <a:cs typeface="Consolas" pitchFamily="34" charset="-120"/>
               </a:rPr>
-              <a:t>7 / 9</a:t>
+              <a:t>9 / 11</a:t>
             </a:r>
             <a:endParaRPr lang="en-US" sz="1100" dirty="0"/>
           </a:p>
@@ -5780,8 +6528,8 @@
         </p:nvSpPr>
         <p:spPr>
           <a:xfrm>
-            <a:off x="11091672" y="6400800"/>
-            <a:ext cx="731520" cy="320040"/>
+            <a:off x="10873192" y="6400800"/>
+            <a:ext cx="950000" cy="320040"/>
           </a:xfrm>
           <a:prstGeom prst="rect">
             <a:avLst/>
@@ -5805,7 +6553,7 @@
                 <a:ea typeface="Consolas" pitchFamily="34" charset="-122"/>
                 <a:cs typeface="Consolas" pitchFamily="34" charset="-120"/>
               </a:rPr>
-              <a:t>8 / 9</a:t>
+              <a:t>10 / 11</a:t>
             </a:r>
             <a:endParaRPr lang="en-US" sz="1100" dirty="0"/>
           </a:p>
